--- a/output/slides/Review09_3_Units_7_9/REV3L1_Review_Practice.pptx
+++ b/output/slides/Review09_3_Units_7_9/REV3L1_Review_Practice.pptx
@@ -3333,7 +3333,7 @@
                 </a:solidFill>
                 <a:latin typeface="Calibri"/>
               </a:rPr>
-              <a:t>UNIT 9  ·  LESSON 1  ·  PERIOD 68</a:t>
+              <a:t>UNIT 9  ·  LESSON 1  ·  PERIOD 70</a:t>
             </a:r>
           </a:p>
         </p:txBody>

--- a/output/slides/Review09_3_Units_7_9/REV3L1_Review_Practice.pptx
+++ b/output/slides/Review09_3_Units_7_9/REV3L1_Review_Practice.pptx
@@ -3910,14 +3910,71 @@
       </p:sp>
       <p:sp>
         <p:nvSpPr>
-          <p:cNvPr id="11" name="TextBox 10"/>
-          <p:cNvSpPr txBox="1"/>
-          <p:nvPr/>
-        </p:nvSpPr>
-        <p:spPr>
-          <a:xfrm>
-            <a:off x="731520" y="5577840"/>
-            <a:ext cx="10698480" cy="822960"/>
+          <p:cNvPr id="11" name="Rounded Rectangle 10"/>
+          <p:cNvSpPr/>
+          <p:nvPr/>
+        </p:nvSpPr>
+        <p:spPr>
+          <a:xfrm>
+            <a:off x="731520" y="5440680"/>
+            <a:ext cx="10698480" cy="530352"/>
+          </a:xfrm>
+          <a:prstGeom prst="roundRect">
+            <a:avLst>
+              <a:gd name="adj" fmla="val 6000"/>
+            </a:avLst>
+          </a:prstGeom>
+          <a:solidFill>
+            <a:srgbClr val="E7F1FA"/>
+          </a:solidFill>
+          <a:ln w="19050">
+            <a:solidFill>
+              <a:srgbClr val="1E6FB8"/>
+            </a:solidFill>
+          </a:ln>
+          <a:effectLst/>
+        </p:spPr>
+        <p:style>
+          <a:lnRef idx="1">
+            <a:schemeClr val="accent1"/>
+          </a:lnRef>
+          <a:fillRef idx="3">
+            <a:schemeClr val="accent1"/>
+          </a:fillRef>
+          <a:effectRef idx="2">
+            <a:schemeClr val="accent1"/>
+          </a:effectRef>
+          <a:fontRef idx="minor">
+            <a:schemeClr val="lt1"/>
+          </a:fontRef>
+        </p:style>
+        <p:txBody>
+          <a:bodyPr rtlCol="0" anchor="ctr" wrap="square" lIns="54864" rIns="54864"/>
+          <a:lstStyle/>
+          <a:p>
+            <a:pPr algn="ctr"/>
+            <a:r>
+              <a:rPr sz="1500" b="1">
+                <a:solidFill>
+                  <a:srgbClr val="142C4F"/>
+                </a:solidFill>
+                <a:hlinkClick r:id="rId2"/>
+              </a:rPr>
+              <a:t>▶ Play audio</a:t>
+            </a:r>
+          </a:p>
+        </p:txBody>
+      </p:sp>
+      <p:sp>
+        <p:nvSpPr>
+          <p:cNvPr id="12" name="TextBox 11"/>
+          <p:cNvSpPr txBox="1"/>
+          <p:nvPr/>
+        </p:nvSpPr>
+        <p:spPr>
+          <a:xfrm>
+            <a:off x="731520" y="6062472"/>
+            <a:ext cx="10698480" cy="502920"/>
           </a:xfrm>
           <a:prstGeom prst="rect">
             <a:avLst/>
@@ -3939,7 +3996,7 @@
               </a:spcAft>
             </a:pPr>
             <a:r>
-              <a:rPr sz="1200" b="0" i="0">
+              <a:rPr sz="1100" b="0" i="0">
                 <a:solidFill>
                   <a:srgbClr val="6B7280"/>
                 </a:solidFill>

--- a/output/slides/Review09_3_Units_7_9/REV3L1_Review_Practice.pptx
+++ b/output/slides/Review09_3_Units_7_9/REV3L1_Review_Practice.pptx
@@ -3836,8 +3836,8 @@
         </p:nvSpPr>
         <p:spPr>
           <a:xfrm>
-            <a:off x="731520" y="4023360"/>
-            <a:ext cx="10698480" cy="1463040"/>
+            <a:off x="731520" y="3703320"/>
+            <a:ext cx="10698480" cy="1435608"/>
           </a:xfrm>
           <a:prstGeom prst="rect">
             <a:avLst/>
@@ -3916,8 +3916,8 @@
         </p:nvSpPr>
         <p:spPr>
           <a:xfrm>
-            <a:off x="731520" y="5440680"/>
-            <a:ext cx="10698480" cy="530352"/>
+            <a:off x="731520" y="5248656"/>
+            <a:ext cx="10698480" cy="512064"/>
           </a:xfrm>
           <a:prstGeom prst="roundRect">
             <a:avLst>
@@ -3949,7 +3949,7 @@
           </a:fontRef>
         </p:style>
         <p:txBody>
-          <a:bodyPr rtlCol="0" anchor="ctr" wrap="square" lIns="54864" rIns="54864"/>
+          <a:bodyPr rtlCol="0" anchor="ctr" wrap="square" lIns="45720" rIns="45720" tIns="0" bIns="0"/>
           <a:lstStyle/>
           <a:p>
             <a:pPr algn="ctr"/>
@@ -3967,14 +3967,71 @@
       </p:sp>
       <p:sp>
         <p:nvSpPr>
-          <p:cNvPr id="12" name="TextBox 11"/>
-          <p:cNvSpPr txBox="1"/>
-          <p:nvPr/>
-        </p:nvSpPr>
-        <p:spPr>
-          <a:xfrm>
-            <a:off x="731520" y="6062472"/>
-            <a:ext cx="10698480" cy="502920"/>
+          <p:cNvPr id="12" name="Rounded Rectangle 11"/>
+          <p:cNvSpPr/>
+          <p:nvPr/>
+        </p:nvSpPr>
+        <p:spPr>
+          <a:xfrm>
+            <a:off x="731520" y="5824728"/>
+            <a:ext cx="10698480" cy="512064"/>
+          </a:xfrm>
+          <a:prstGeom prst="roundRect">
+            <a:avLst>
+              <a:gd name="adj" fmla="val 6000"/>
+            </a:avLst>
+          </a:prstGeom>
+          <a:solidFill>
+            <a:srgbClr val="E3F3EE"/>
+          </a:solidFill>
+          <a:ln w="19050">
+            <a:solidFill>
+              <a:srgbClr val="0E7C66"/>
+            </a:solidFill>
+          </a:ln>
+          <a:effectLst/>
+        </p:spPr>
+        <p:style>
+          <a:lnRef idx="1">
+            <a:schemeClr val="accent1"/>
+          </a:lnRef>
+          <a:fillRef idx="3">
+            <a:schemeClr val="accent1"/>
+          </a:fillRef>
+          <a:effectRef idx="2">
+            <a:schemeClr val="accent1"/>
+          </a:effectRef>
+          <a:fontRef idx="minor">
+            <a:schemeClr val="lt1"/>
+          </a:fontRef>
+        </p:style>
+        <p:txBody>
+          <a:bodyPr rtlCol="0" anchor="ctr" wrap="square" lIns="45720" rIns="45720" tIns="0" bIns="0"/>
+          <a:lstStyle/>
+          <a:p>
+            <a:pPr algn="ctr"/>
+            <a:r>
+              <a:rPr sz="1400" b="1">
+                <a:solidFill>
+                  <a:srgbClr val="0E7C66"/>
+                </a:solidFill>
+                <a:hlinkClick r:id="rId3"/>
+              </a:rPr>
+              <a:t>🌐 Listen online</a:t>
+            </a:r>
+          </a:p>
+        </p:txBody>
+      </p:sp>
+      <p:sp>
+        <p:nvSpPr>
+          <p:cNvPr id="13" name="TextBox 12"/>
+          <p:cNvSpPr txBox="1"/>
+          <p:nvPr/>
+        </p:nvSpPr>
+        <p:spPr>
+          <a:xfrm>
+            <a:off x="731520" y="6428232"/>
+            <a:ext cx="10698480" cy="384048"/>
           </a:xfrm>
           <a:prstGeom prst="rect">
             <a:avLst/>
@@ -3996,7 +4053,7 @@
               </a:spcAft>
             </a:pPr>
             <a:r>
-              <a:rPr sz="1100" b="0" i="0">
+              <a:rPr sz="1000" b="0" i="0">
                 <a:solidFill>
                   <a:srgbClr val="6B7280"/>
                 </a:solidFill>
